--- a/brain/library/internal/one-pagers/Behavioral Health Practice Management April 2026.pptx
+++ b/brain/library/internal/one-pagers/Behavioral Health Practice Management April 2026.pptx
@@ -15115,7 +15115,7 @@
                       </a:pPr>
                       <a:r>
                         <a:rPr b="1" lang="en-US" sz="1400" u="none" cap="none" strike="noStrike"/>
-                        <a:t>Assessment: Pending Scoring</a:t>
+                        <a:t>Assessment: 2.48 / 3.0 (83%)</a:t>
                       </a:r>
                       <a:endParaRPr sz="1400" u="none" cap="none" strike="noStrike">
                         <a:highlight>
